--- a/docs/Music_Recommender_Slide_Deck.pptx
+++ b/docs/Music_Recommender_Slide_Deck.pptx
@@ -15315,7 +15315,7 @@
                 <a:ea typeface="Courier New" pitchFamily="34" charset="-122"/>
                 <a:cs typeface="Courier New" pitchFamily="34" charset="-120"/>
               </a:rPr>
-              <a:t>81</a:t>
+              <a:t>86</a:t>
             </a:r>
             <a:endParaRPr lang="en-US" sz="3750" dirty="0"/>
           </a:p>
@@ -15397,7 +15397,7 @@
                 <a:ea typeface="Courier New" pitchFamily="34" charset="-122"/>
                 <a:cs typeface="Courier New" pitchFamily="34" charset="-120"/>
               </a:rPr>
-              <a:t>94%</a:t>
+              <a:t>95%</a:t>
             </a:r>
             <a:endParaRPr lang="en-US" sz="3750" dirty="0"/>
           </a:p>

--- a/docs/Music_Recommender_Slide_Deck.pptx
+++ b/docs/Music_Recommender_Slide_Deck.pptx
@@ -10281,6 +10281,102 @@
                 <a:cs typeface="Arial" pitchFamily="34" charset="-120"/>
               </a:rPr>
               <a:t>— the two pull in opposite directions.</a:t>
+            </a:r>
+            <a:endParaRPr lang="en-US" sz="2325" dirty="0"/>
+          </a:p>
+        </p:txBody>
+      </p:sp>
+      <p:sp>
+        <p:nvSpPr>
+          <p:cNvPr id="12" name="Text 12"/>
+          <p:cNvSpPr/>
+          <p:nvPr/>
+        </p:nvSpPr>
+        <p:spPr>
+          <a:xfrm>
+            <a:off x="9409176" y="8151614"/>
+            <a:ext cx="361950" cy="347663"/>
+          </a:xfrm>
+          <a:prstGeom prst="rect">
+            <a:avLst/>
+          </a:prstGeom>
+          <a:noFill/>
+          <a:ln/>
+        </p:spPr>
+        <p:txBody>
+          <a:bodyPr wrap="square" lIns="25400" tIns="25400" rIns="25400" bIns="25400" rtlCol="0" anchor="t">
+            <a:normAutofit/>
+          </a:bodyPr>
+          <a:lstStyle/>
+          <a:p>
+            <a:pPr marL="0" indent="0" algn="l">
+              <a:buNone/>
+            </a:pPr>
+            <a:r>
+              <a:rPr lang="en-US" sz="1875" dirty="0">
+                <a:solidFill>
+                  <a:srgbClr val="FF4D5E"/>
+                </a:solidFill>
+                <a:latin typeface="Courier New" pitchFamily="34" charset="0"/>
+                <a:ea typeface="Courier New" pitchFamily="34" charset="-122"/>
+                <a:cs typeface="Courier New" pitchFamily="34" charset="-120"/>
+              </a:rPr>
+              <a:t>06</a:t>
+            </a:r>
+            <a:endParaRPr lang="en-US" sz="1875" dirty="0"/>
+          </a:p>
+        </p:txBody>
+      </p:sp>
+      <p:sp>
+        <p:nvSpPr>
+          <p:cNvPr id="13" name="Text 13"/>
+          <p:cNvSpPr/>
+          <p:nvPr/>
+        </p:nvSpPr>
+        <p:spPr>
+          <a:xfrm>
+            <a:off x="9866376" y="8089702"/>
+            <a:ext cx="7652385" cy="827038"/>
+          </a:xfrm>
+          <a:prstGeom prst="rect">
+            <a:avLst/>
+          </a:prstGeom>
+          <a:noFill/>
+          <a:ln/>
+        </p:spPr>
+        <p:txBody>
+          <a:bodyPr wrap="square" lIns="25400" tIns="25400" rIns="25400" bIns="25400" rtlCol="0" anchor="t">
+            <a:normAutofit fontScale="92500" lnSpcReduction="20000"/>
+          </a:bodyPr>
+          <a:lstStyle/>
+          <a:p>
+            <a:pPr marL="0" indent="0" algn="l">
+              <a:lnSpc>
+                <a:spcPct val="132000"/>
+              </a:lnSpc>
+              <a:buNone/>
+            </a:pPr>
+            <a:r>
+              <a:rPr lang="en-US" sz="2325" b="1" dirty="0">
+                <a:solidFill>
+                  <a:srgbClr val="EAEEF7"/>
+                </a:solidFill>
+                <a:latin typeface="Arial" pitchFamily="34" charset="0"/>
+                <a:ea typeface="Arial" pitchFamily="34" charset="-122"/>
+                <a:cs typeface="Arial" pitchFamily="34" charset="-120"/>
+              </a:rPr>
+              <a:t>Serving a 13-second cold start </a:t>
+            </a:r>
+            <a:r>
+              <a:rPr lang="en-US" sz="2325" dirty="0">
+                <a:solidFill>
+                  <a:srgbClr val="EAEEF7"/>
+                </a:solidFill>
+                <a:latin typeface="Arial" pitchFamily="34" charset="0"/>
+                <a:ea typeface="Arial" pitchFamily="34" charset="-122"/>
+                <a:cs typeface="Arial" pitchFamily="34" charset="-120"/>
+              </a:rPr>
+              <a:t>— precomputing all 15,136 lists so the demo needs no server.</a:t>
             </a:r>
             <a:endParaRPr lang="en-US" sz="2325" dirty="0"/>
           </a:p>
